--- a/slides/Toan12/Slide_TOAN12_Bai3_T10-13.pptx
+++ b/slides/Toan12/Slide_TOAN12_Bai3_T10-13.pptx
@@ -3723,7 +3723,7 @@
                 </a:pPr>
                 <a:r>
                   <a:rPr lang="vi-VN"/>
-                  <a:t>y=\frac{x^2-x+2}{x+1}=x-2+\frac{4}{x+1}</a:t>
+                  <a:t>y=\frac{x^2−x+2}{x+1}=x−2+\frac{4}{x+1}</a:t>
                 </a:r>
               </a:p>
               <a:p>
@@ -3739,7 +3739,7 @@
                 </a:pPr>
                 <a:r>
                   <a:rPr lang="vi-VN"/>
-                  <a:t>\lim[f(x)-(x-2)]=0</a:t>
+                  <a:t>\lim[f(x)−(x−2)]=0</a:t>
                 </a:r>
               </a:p>
             </p:txBody>
@@ -4385,7 +4385,7 @@
                 </a:pPr>
                 <a:r>
                   <a:rPr lang="vi-VN"/>
-                  <a:t>y=\frac{3-x}{2x+1}</a:t>
+                  <a:t>y=\frac{3−x}{2x+1}</a:t>
                 </a:r>
                 <a:r>
                   <a:rPr sz="2400">
@@ -4427,7 +4427,7 @@
                 </a:pPr>
                 <a:r>
                   <a:rPr lang="vi-VN"/>
-                  <a:t>y=\frac{2x^2+x-1}{x+2}=2x-3+\frac{5}{x+2}</a:t>
+                  <a:t>y=\frac{2x^2+x−1}{x+2}=2x−3+\frac{5}{x+2}</a:t>
                 </a:r>
               </a:p>
               <a:p>
@@ -4928,7 +4928,7 @@
                 </a:r>
                 <a:r>
                   <a:rPr lang="vi-VN"/>
-                  <a:t>y=\frac{x-1}{x^2-1}</a:t>
+                  <a:t>y=\frac{x−1}{x^2−1}</a:t>
                 </a:r>
                 <a:r>
                   <a:rPr sz="2400">
@@ -4962,7 +4962,7 @@
                 </a:r>
                 <a:r>
                   <a:rPr lang="vi-VN"/>
-                  <a:t>\frac{2x^2+x-1}{x+2}</a:t>
+                  <a:t>\frac{2x^2+x−1}{x+2}</a:t>
                 </a:r>
                 <a:r>
                   <a:rPr sz="2400">
@@ -7047,7 +7047,7 @@
                 </a:r>
                 <a:r>
                   <a:rPr lang="vi-VN"/>
-                  <a:t>m(t)=15e^{-0{,}012t}</a:t>
+                  <a:t>m(t)=15e^{−0{,}012t}</a:t>
                 </a:r>
                 <a:r>
                   <a:rPr sz="2400" b="1">
@@ -7938,7 +7938,7 @@
                 </a:r>
                 <a:r>
                   <a:rPr lang="vi-VN"/>
-                  <a:t>\underset{x\to-\infty}{\mathrm{lim}}f(x)=y_0</a:t>
+                  <a:t>\underset{x\to−\infty}{\mathrm{lim}}f(x)=y_0</a:t>
                 </a:r>
               </a:p>
             </p:txBody>
@@ -8437,7 +8437,7 @@
                 </a:pPr>
                 <a:r>
                   <a:rPr lang="vi-VN"/>
-                  <a:t>y=\frac{3x-2}{x+1}</a:t>
+                  <a:t>y=\frac{3x−2}{x+1}</a:t>
                 </a:r>
                 <a:r>
                   <a:rPr sz="2400">
@@ -8496,7 +8496,7 @@
                 </a:r>
                 <a:r>
                   <a:rPr lang="vi-VN"/>
-                  <a:t>y=\frac{2x-1}{x-1}</a:t>
+                  <a:t>y=\frac{2x−1}{x−1}</a:t>
                 </a:r>
                 <a:r>
                   <a:rPr sz="2400">
@@ -9603,7 +9603,7 @@
                 </a:r>
                 <a:r>
                   <a:rPr lang="vi-VN"/>
-                  <a:t>\frac{x}{x-1}\to+\infty</a:t>
+                  <a:t>\frac{x}{x−1}\to+\infty</a:t>
                 </a:r>
                 <a:r>
                   <a:rPr sz="2400">
@@ -9641,7 +9641,7 @@
                 </a:r>
                 <a:r>
                   <a:rPr lang="vi-VN"/>
-                  <a:t>y=\frac{3-x}{x+2}</a:t>
+                  <a:t>y=\frac{3−x}{x+2}</a:t>
                 </a:r>
                 <a:r>
                   <a:rPr sz="2400">
@@ -9992,7 +9992,7 @@
                 </a:r>
                 <a:r>
                   <a:rPr lang="vi-VN"/>
-                  <a:t>\underset{x\to x_0^-}{\mathrm{lim}}f(x)=\pm\infty</a:t>
+                  <a:t>\underset{x\to x_0^−}{\mathrm{lim}}f(x)=\pm\infty</a:t>
                 </a:r>
               </a:p>
             </p:txBody>
@@ -10421,7 +10421,7 @@
                 </a:r>
                 <a:r>
                   <a:rPr lang="vi-VN"/>
-                  <a:t>C(p)=\frac{45p}{100-p}</a:t>
+                  <a:t>C(p)=\frac{45p}{100−p}</a:t>
                 </a:r>
                 <a:r>
                   <a:rPr sz="2400" b="1">
@@ -10446,7 +10446,7 @@
                 </a:pPr>
                 <a:r>
                   <a:rPr lang="vi-VN"/>
-                  <a:t>\underset{p\to 100^-}{\mathrm{lim}}C(p)=+\infty</a:t>
+                  <a:t>\underset{p\to 100^−}{\mathrm{lim}}C(p)=+\infty</a:t>
                 </a:r>
                 <a:r>
                   <a:rPr sz="2400">
@@ -10958,7 +10958,7 @@
                 </a:r>
                 <a:r>
                   <a:rPr lang="vi-VN"/>
-                  <a:t>f(x)-(x-1)=\frac{2}{x+1}\to 0</a:t>
+                  <a:t>f(x)−(x−1)=\frac{2}{x+1}\to 0</a:t>
                 </a:r>
               </a:p>
               <a:p>
@@ -11255,7 +11255,7 @@
                 </a:r>
                 <a:r>
                   <a:rPr lang="vi-VN"/>
-                  <a:t>\underset{x\to\pm\infty}{\mathrm{lim}}[f(x)-(ax+b)]=0</a:t>
+                  <a:t>\underset{x\to\pm\infty}{\mathrm{lim}}[f(x)−(ax+b)]=0</a:t>
                 </a:r>
                 <a:r>
                   <a:rPr sz="2400" b="1">
@@ -11297,7 +11297,7 @@
                 </a:r>
                 <a:r>
                   <a:rPr lang="vi-VN"/>
-                  <a:t>b=\lim[f(x)-ax]</a:t>
+                  <a:t>b=\lim[f(x)−ax]</a:t>
                 </a:r>
               </a:p>
             </p:txBody>
